--- a/BannerBK.pptx
+++ b/BannerBK.pptx
@@ -105,6 +105,11 @@
       </a:defRPr>
     </a:lvl9pPr>
   </p:defaultTextStyle>
+  <p:extLst>
+    <p:ext uri="{EFAFB233-063F-42B5-8137-9DF3F51BA10A}">
+      <p15:sldGuideLst xmlns:p15="http://schemas.microsoft.com/office/powerpoint/2012/main"/>
+    </p:ext>
+  </p:extLst>
 </p:presentation>
 </file>
 
@@ -239,7 +244,7 @@
           <a:p>
             <a:fld id="{A5F0FC52-D451-431C-837C-0FC9725A9C5A}" type="datetimeFigureOut">
               <a:rPr lang="pt-BR" smtClean="0"/>
-              <a:t>14/08/2026</a:t>
+              <a:t>17/08/2026</a:t>
             </a:fld>
             <a:endParaRPr lang="pt-BR"/>
           </a:p>
@@ -409,7 +414,7 @@
           <a:p>
             <a:fld id="{A5F0FC52-D451-431C-837C-0FC9725A9C5A}" type="datetimeFigureOut">
               <a:rPr lang="pt-BR" smtClean="0"/>
-              <a:t>14/08/2026</a:t>
+              <a:t>17/08/2026</a:t>
             </a:fld>
             <a:endParaRPr lang="pt-BR"/>
           </a:p>
@@ -589,7 +594,7 @@
           <a:p>
             <a:fld id="{A5F0FC52-D451-431C-837C-0FC9725A9C5A}" type="datetimeFigureOut">
               <a:rPr lang="pt-BR" smtClean="0"/>
-              <a:t>14/08/2026</a:t>
+              <a:t>17/08/2026</a:t>
             </a:fld>
             <a:endParaRPr lang="pt-BR"/>
           </a:p>
@@ -759,7 +764,7 @@
           <a:p>
             <a:fld id="{A5F0FC52-D451-431C-837C-0FC9725A9C5A}" type="datetimeFigureOut">
               <a:rPr lang="pt-BR" smtClean="0"/>
-              <a:t>14/08/2026</a:t>
+              <a:t>17/08/2026</a:t>
             </a:fld>
             <a:endParaRPr lang="pt-BR"/>
           </a:p>
@@ -1005,7 +1010,7 @@
           <a:p>
             <a:fld id="{A5F0FC52-D451-431C-837C-0FC9725A9C5A}" type="datetimeFigureOut">
               <a:rPr lang="pt-BR" smtClean="0"/>
-              <a:t>14/08/2026</a:t>
+              <a:t>17/08/2026</a:t>
             </a:fld>
             <a:endParaRPr lang="pt-BR"/>
           </a:p>
@@ -1237,7 +1242,7 @@
           <a:p>
             <a:fld id="{A5F0FC52-D451-431C-837C-0FC9725A9C5A}" type="datetimeFigureOut">
               <a:rPr lang="pt-BR" smtClean="0"/>
-              <a:t>14/08/2026</a:t>
+              <a:t>17/08/2026</a:t>
             </a:fld>
             <a:endParaRPr lang="pt-BR"/>
           </a:p>
@@ -1604,7 +1609,7 @@
           <a:p>
             <a:fld id="{A5F0FC52-D451-431C-837C-0FC9725A9C5A}" type="datetimeFigureOut">
               <a:rPr lang="pt-BR" smtClean="0"/>
-              <a:t>14/08/2026</a:t>
+              <a:t>17/08/2026</a:t>
             </a:fld>
             <a:endParaRPr lang="pt-BR"/>
           </a:p>
@@ -1722,7 +1727,7 @@
           <a:p>
             <a:fld id="{A5F0FC52-D451-431C-837C-0FC9725A9C5A}" type="datetimeFigureOut">
               <a:rPr lang="pt-BR" smtClean="0"/>
-              <a:t>14/08/2026</a:t>
+              <a:t>17/08/2026</a:t>
             </a:fld>
             <a:endParaRPr lang="pt-BR"/>
           </a:p>
@@ -1817,7 +1822,7 @@
           <a:p>
             <a:fld id="{A5F0FC52-D451-431C-837C-0FC9725A9C5A}" type="datetimeFigureOut">
               <a:rPr lang="pt-BR" smtClean="0"/>
-              <a:t>14/08/2026</a:t>
+              <a:t>17/08/2026</a:t>
             </a:fld>
             <a:endParaRPr lang="pt-BR"/>
           </a:p>
@@ -2094,7 +2099,7 @@
           <a:p>
             <a:fld id="{A5F0FC52-D451-431C-837C-0FC9725A9C5A}" type="datetimeFigureOut">
               <a:rPr lang="pt-BR" smtClean="0"/>
-              <a:t>14/08/2026</a:t>
+              <a:t>17/08/2026</a:t>
             </a:fld>
             <a:endParaRPr lang="pt-BR"/>
           </a:p>
@@ -2351,7 +2356,7 @@
           <a:p>
             <a:fld id="{A5F0FC52-D451-431C-837C-0FC9725A9C5A}" type="datetimeFigureOut">
               <a:rPr lang="pt-BR" smtClean="0"/>
-              <a:t>14/08/2026</a:t>
+              <a:t>17/08/2026</a:t>
             </a:fld>
             <a:endParaRPr lang="pt-BR"/>
           </a:p>
@@ -2564,7 +2569,7 @@
           <a:p>
             <a:fld id="{A5F0FC52-D451-431C-837C-0FC9725A9C5A}" type="datetimeFigureOut">
               <a:rPr lang="pt-BR" smtClean="0"/>
-              <a:t>14/08/2026</a:t>
+              <a:t>17/08/2026</a:t>
             </a:fld>
             <a:endParaRPr lang="pt-BR"/>
           </a:p>
@@ -3677,7 +3682,7 @@
         </p:blipFill>
         <p:spPr>
           <a:xfrm>
-            <a:off x="2241896" y="2370892"/>
+            <a:off x="2242016" y="2370892"/>
             <a:ext cx="2296424" cy="2296424"/>
           </a:xfrm>
           <a:prstGeom prst="rect">
@@ -3828,7 +3833,7 @@
           <a:lstStyle/>
           <a:p>
             <a:r>
-              <a:rPr lang="pt-BR" sz="2000" dirty="0">
+              <a:rPr lang="pt-BR" dirty="0">
                 <a:solidFill>
                   <a:schemeClr val="bg1"/>
                 </a:solidFill>
@@ -3853,8 +3858,8 @@
         </p:nvSpPr>
         <p:spPr>
           <a:xfrm>
-            <a:off x="964208" y="2171710"/>
-            <a:ext cx="964883" cy="830997"/>
+            <a:off x="938571" y="2239898"/>
+            <a:ext cx="890083" cy="769441"/>
           </a:xfrm>
           <a:prstGeom prst="rect">
             <a:avLst/>
@@ -3868,7 +3873,7 @@
           <a:lstStyle/>
           <a:p>
             <a:r>
-              <a:rPr lang="pt-BR" sz="4800" dirty="0">
+              <a:rPr lang="pt-BR" sz="4400" dirty="0">
                 <a:solidFill>
                   <a:schemeClr val="bg1"/>
                 </a:solidFill>
@@ -3899,8 +3904,8 @@
         </p:nvSpPr>
         <p:spPr>
           <a:xfrm>
-            <a:off x="310282" y="2802539"/>
-            <a:ext cx="1650527" cy="400110"/>
+            <a:off x="356699" y="2830018"/>
+            <a:ext cx="1650527" cy="369332"/>
           </a:xfrm>
           <a:prstGeom prst="rect">
             <a:avLst/>
@@ -3914,7 +3919,7 @@
           <a:lstStyle/>
           <a:p>
             <a:r>
-              <a:rPr lang="pt-BR" sz="2000" dirty="0">
+              <a:rPr lang="pt-BR" dirty="0">
                 <a:solidFill>
                   <a:schemeClr val="bg1"/>
                 </a:solidFill>
@@ -3922,12 +3927,6 @@
               </a:rPr>
               <a:t>WHOPPER</a:t>
             </a:r>
-            <a:endParaRPr lang="pt-BR" dirty="0">
-              <a:solidFill>
-                <a:schemeClr val="bg1"/>
-              </a:solidFill>
-              <a:latin typeface="Cooper Black" panose="0208090404030B020404" pitchFamily="18" charset="0"/>
-            </a:endParaRPr>
           </a:p>
         </p:txBody>
       </p:sp>
@@ -3959,7 +3958,7 @@
         </p:blipFill>
         <p:spPr>
           <a:xfrm rot="1213706">
-            <a:off x="1339657" y="2001264"/>
+            <a:off x="1319055" y="2021726"/>
             <a:ext cx="778341" cy="583756"/>
           </a:xfrm>
           <a:prstGeom prst="rect">
@@ -4079,7 +4078,7 @@
         </p:nvSpPr>
         <p:spPr>
           <a:xfrm>
-            <a:off x="6584409" y="1741505"/>
+            <a:off x="6603464" y="1741505"/>
             <a:ext cx="45719" cy="2597133"/>
           </a:xfrm>
           <a:prstGeom prst="rect">
@@ -4360,8 +4359,8 @@
         </p:nvSpPr>
         <p:spPr>
           <a:xfrm>
-            <a:off x="3206460" y="2151284"/>
-            <a:ext cx="964883" cy="769441"/>
+            <a:off x="3193860" y="2270676"/>
+            <a:ext cx="964883" cy="707886"/>
           </a:xfrm>
           <a:prstGeom prst="rect">
             <a:avLst/>
@@ -4375,7 +4374,7 @@
           <a:lstStyle/>
           <a:p>
             <a:r>
-              <a:rPr lang="pt-BR" sz="4400" dirty="0">
+              <a:rPr lang="pt-BR" sz="4000" dirty="0">
                 <a:solidFill>
                   <a:schemeClr val="bg1"/>
                 </a:solidFill>
@@ -4420,7 +4419,7 @@
         </p:blipFill>
         <p:spPr>
           <a:xfrm rot="1213706">
-            <a:off x="3607668" y="2027222"/>
+            <a:off x="3517939" y="2069146"/>
             <a:ext cx="778341" cy="583756"/>
           </a:xfrm>
           <a:prstGeom prst="rect">
@@ -4430,10 +4429,10 @@
       </p:pic>
       <p:sp>
         <p:nvSpPr>
-          <p:cNvPr id="57" name="CaixaDeTexto 56">
+          <p:cNvPr id="7" name="CaixaDeTexto 6">
             <a:extLst>
               <a:ext uri="{FF2B5EF4-FFF2-40B4-BE49-F238E27FC236}">
-                <a16:creationId xmlns:a16="http://schemas.microsoft.com/office/drawing/2014/main" id="{69D8EE19-7C87-3EED-CDC3-DC35072FC4CF}"/>
+                <a16:creationId xmlns:a16="http://schemas.microsoft.com/office/drawing/2014/main" id="{8A41C45A-9595-97BB-E3CD-B270E98D95EE}"/>
               </a:ext>
             </a:extLst>
           </p:cNvPr>
@@ -4442,8 +4441,8 @@
         </p:nvSpPr>
         <p:spPr>
           <a:xfrm>
-            <a:off x="6536413" y="299352"/>
-            <a:ext cx="1766944" cy="923330"/>
+            <a:off x="4897435" y="2168669"/>
+            <a:ext cx="628650" cy="369332"/>
           </a:xfrm>
           <a:prstGeom prst="rect">
             <a:avLst/>
@@ -4451,7 +4450,399 @@
           <a:noFill/>
         </p:spPr>
         <p:txBody>
-          <a:bodyPr wrap="square">
+          <a:bodyPr wrap="square" rtlCol="0">
+            <a:prstTxWarp prst="textStop">
+              <a:avLst>
+                <a:gd name="adj" fmla="val 17263"/>
+              </a:avLst>
+            </a:prstTxWarp>
+            <a:spAutoFit/>
+          </a:bodyPr>
+          <a:lstStyle/>
+          <a:p>
+            <a:r>
+              <a:rPr lang="pt-BR" sz="1200" dirty="0">
+                <a:solidFill>
+                  <a:srgbClr val="FBBF00"/>
+                </a:solidFill>
+                <a:latin typeface="Cooper Black" panose="0208090404030B020404" pitchFamily="18" charset="0"/>
+              </a:rPr>
+              <a:t>Por</a:t>
+            </a:r>
+            <a:endParaRPr lang="pt-BR" dirty="0">
+              <a:solidFill>
+                <a:srgbClr val="FBBF00"/>
+              </a:solidFill>
+              <a:latin typeface="Cooper Black" panose="0208090404030B020404" pitchFamily="18" charset="0"/>
+            </a:endParaRPr>
+          </a:p>
+        </p:txBody>
+      </p:sp>
+      <p:sp>
+        <p:nvSpPr>
+          <p:cNvPr id="11" name="CaixaDeTexto 10">
+            <a:extLst>
+              <a:ext uri="{FF2B5EF4-FFF2-40B4-BE49-F238E27FC236}">
+                <a16:creationId xmlns:a16="http://schemas.microsoft.com/office/drawing/2014/main" id="{63D84AE0-098B-F57A-B824-D6120BC300DB}"/>
+              </a:ext>
+            </a:extLst>
+          </p:cNvPr>
+          <p:cNvSpPr txBox="1"/>
+          <p:nvPr/>
+        </p:nvSpPr>
+        <p:spPr>
+          <a:xfrm>
+            <a:off x="7103851" y="2151284"/>
+            <a:ext cx="628650" cy="369332"/>
+          </a:xfrm>
+          <a:prstGeom prst="rect">
+            <a:avLst/>
+          </a:prstGeom>
+          <a:noFill/>
+        </p:spPr>
+        <p:txBody>
+          <a:bodyPr wrap="square" rtlCol="0">
+            <a:prstTxWarp prst="textStop">
+              <a:avLst>
+                <a:gd name="adj" fmla="val 17263"/>
+              </a:avLst>
+            </a:prstTxWarp>
+            <a:spAutoFit/>
+          </a:bodyPr>
+          <a:lstStyle/>
+          <a:p>
+            <a:r>
+              <a:rPr lang="pt-BR" sz="1200" dirty="0">
+                <a:solidFill>
+                  <a:srgbClr val="FBBF00"/>
+                </a:solidFill>
+                <a:latin typeface="Cooper Black" panose="0208090404030B020404" pitchFamily="18" charset="0"/>
+              </a:rPr>
+              <a:t>Por</a:t>
+            </a:r>
+            <a:endParaRPr lang="pt-BR" dirty="0">
+              <a:solidFill>
+                <a:srgbClr val="FBBF00"/>
+              </a:solidFill>
+              <a:latin typeface="Cooper Black" panose="0208090404030B020404" pitchFamily="18" charset="0"/>
+            </a:endParaRPr>
+          </a:p>
+        </p:txBody>
+      </p:sp>
+      <p:sp>
+        <p:nvSpPr>
+          <p:cNvPr id="23" name="CaixaDeTexto 22">
+            <a:extLst>
+              <a:ext uri="{FF2B5EF4-FFF2-40B4-BE49-F238E27FC236}">
+                <a16:creationId xmlns:a16="http://schemas.microsoft.com/office/drawing/2014/main" id="{4C899761-1E30-51E5-6E98-2E65FEF55747}"/>
+              </a:ext>
+            </a:extLst>
+          </p:cNvPr>
+          <p:cNvSpPr txBox="1"/>
+          <p:nvPr/>
+        </p:nvSpPr>
+        <p:spPr>
+          <a:xfrm>
+            <a:off x="4925924" y="2492555"/>
+            <a:ext cx="532643" cy="400110"/>
+          </a:xfrm>
+          <a:prstGeom prst="rect">
+            <a:avLst/>
+          </a:prstGeom>
+          <a:noFill/>
+        </p:spPr>
+        <p:txBody>
+          <a:bodyPr wrap="square" rtlCol="0">
+            <a:prstTxWarp prst="textChevronInverted">
+              <a:avLst/>
+            </a:prstTxWarp>
+            <a:spAutoFit/>
+          </a:bodyPr>
+          <a:lstStyle/>
+          <a:p>
+            <a:r>
+              <a:rPr lang="pt-BR" sz="2000" dirty="0">
+                <a:solidFill>
+                  <a:schemeClr val="bg1"/>
+                </a:solidFill>
+                <a:latin typeface="Cooper Black" panose="0208090404030B020404" pitchFamily="18" charset="0"/>
+              </a:rPr>
+              <a:t>R$</a:t>
+            </a:r>
+          </a:p>
+        </p:txBody>
+      </p:sp>
+      <p:sp>
+        <p:nvSpPr>
+          <p:cNvPr id="26" name="CaixaDeTexto 25">
+            <a:extLst>
+              <a:ext uri="{FF2B5EF4-FFF2-40B4-BE49-F238E27FC236}">
+                <a16:creationId xmlns:a16="http://schemas.microsoft.com/office/drawing/2014/main" id="{AC74DD07-2440-874F-E8A2-A516DDD237D4}"/>
+              </a:ext>
+            </a:extLst>
+          </p:cNvPr>
+          <p:cNvSpPr txBox="1"/>
+          <p:nvPr/>
+        </p:nvSpPr>
+        <p:spPr>
+          <a:xfrm>
+            <a:off x="7131172" y="2492555"/>
+            <a:ext cx="532643" cy="400110"/>
+          </a:xfrm>
+          <a:prstGeom prst="rect">
+            <a:avLst/>
+          </a:prstGeom>
+          <a:noFill/>
+        </p:spPr>
+        <p:txBody>
+          <a:bodyPr wrap="square" rtlCol="0">
+            <a:prstTxWarp prst="textChevronInverted">
+              <a:avLst/>
+            </a:prstTxWarp>
+            <a:spAutoFit/>
+          </a:bodyPr>
+          <a:lstStyle/>
+          <a:p>
+            <a:r>
+              <a:rPr lang="pt-BR" sz="2000" dirty="0">
+                <a:solidFill>
+                  <a:schemeClr val="bg1"/>
+                </a:solidFill>
+                <a:latin typeface="Cooper Black" panose="0208090404030B020404" pitchFamily="18" charset="0"/>
+              </a:rPr>
+              <a:t>R$</a:t>
+            </a:r>
+          </a:p>
+        </p:txBody>
+      </p:sp>
+      <p:sp>
+        <p:nvSpPr>
+          <p:cNvPr id="28" name="CaixaDeTexto 27">
+            <a:extLst>
+              <a:ext uri="{FF2B5EF4-FFF2-40B4-BE49-F238E27FC236}">
+                <a16:creationId xmlns:a16="http://schemas.microsoft.com/office/drawing/2014/main" id="{4D71B507-7E26-8D0D-FF39-C1D93C01684E}"/>
+              </a:ext>
+            </a:extLst>
+          </p:cNvPr>
+          <p:cNvSpPr txBox="1"/>
+          <p:nvPr/>
+        </p:nvSpPr>
+        <p:spPr>
+          <a:xfrm>
+            <a:off x="2303132" y="2851252"/>
+            <a:ext cx="2164657" cy="338554"/>
+          </a:xfrm>
+          <a:prstGeom prst="rect">
+            <a:avLst/>
+          </a:prstGeom>
+          <a:noFill/>
+        </p:spPr>
+        <p:txBody>
+          <a:bodyPr wrap="square" rtlCol="0">
+            <a:spAutoFit/>
+          </a:bodyPr>
+          <a:lstStyle/>
+          <a:p>
+            <a:r>
+              <a:rPr lang="pt-BR" sz="1600" dirty="0">
+                <a:solidFill>
+                  <a:schemeClr val="bg1"/>
+                </a:solidFill>
+                <a:latin typeface="Cooper Black" panose="0208090404030B020404" pitchFamily="18" charset="0"/>
+              </a:rPr>
+              <a:t>WHOPPER BACON</a:t>
+            </a:r>
+          </a:p>
+        </p:txBody>
+      </p:sp>
+      <p:sp>
+        <p:nvSpPr>
+          <p:cNvPr id="30" name="CaixaDeTexto 29">
+            <a:extLst>
+              <a:ext uri="{FF2B5EF4-FFF2-40B4-BE49-F238E27FC236}">
+                <a16:creationId xmlns:a16="http://schemas.microsoft.com/office/drawing/2014/main" id="{D1514D7B-C97A-796E-2CAB-23675CD24165}"/>
+              </a:ext>
+            </a:extLst>
+          </p:cNvPr>
+          <p:cNvSpPr txBox="1"/>
+          <p:nvPr/>
+        </p:nvSpPr>
+        <p:spPr>
+          <a:xfrm>
+            <a:off x="5400148" y="2277294"/>
+            <a:ext cx="964883" cy="707886"/>
+          </a:xfrm>
+          <a:prstGeom prst="rect">
+            <a:avLst/>
+          </a:prstGeom>
+          <a:noFill/>
+        </p:spPr>
+        <p:txBody>
+          <a:bodyPr wrap="square" rtlCol="0">
+            <a:spAutoFit/>
+          </a:bodyPr>
+          <a:lstStyle/>
+          <a:p>
+            <a:r>
+              <a:rPr lang="pt-BR" sz="4000" dirty="0">
+                <a:solidFill>
+                  <a:schemeClr val="bg1"/>
+                </a:solidFill>
+                <a:latin typeface="Cooper Black" panose="0208090404030B020404" pitchFamily="18" charset="0"/>
+              </a:rPr>
+              <a:t>30</a:t>
+            </a:r>
+            <a:endParaRPr lang="pt-BR" dirty="0">
+              <a:solidFill>
+                <a:schemeClr val="bg1"/>
+              </a:solidFill>
+              <a:latin typeface="Cooper Black" panose="0208090404030B020404" pitchFamily="18" charset="0"/>
+            </a:endParaRPr>
+          </a:p>
+        </p:txBody>
+      </p:sp>
+      <p:sp>
+        <p:nvSpPr>
+          <p:cNvPr id="34" name="CaixaDeTexto 33">
+            <a:extLst>
+              <a:ext uri="{FF2B5EF4-FFF2-40B4-BE49-F238E27FC236}">
+                <a16:creationId xmlns:a16="http://schemas.microsoft.com/office/drawing/2014/main" id="{EFCF31FD-CE82-399F-FF10-3D50F50D3A94}"/>
+              </a:ext>
+            </a:extLst>
+          </p:cNvPr>
+          <p:cNvSpPr txBox="1"/>
+          <p:nvPr/>
+        </p:nvSpPr>
+        <p:spPr>
+          <a:xfrm>
+            <a:off x="7607305" y="2271690"/>
+            <a:ext cx="964883" cy="707886"/>
+          </a:xfrm>
+          <a:prstGeom prst="rect">
+            <a:avLst/>
+          </a:prstGeom>
+          <a:noFill/>
+        </p:spPr>
+        <p:txBody>
+          <a:bodyPr wrap="square" rtlCol="0">
+            <a:spAutoFit/>
+          </a:bodyPr>
+          <a:lstStyle/>
+          <a:p>
+            <a:r>
+              <a:rPr lang="pt-BR" sz="4000" dirty="0">
+                <a:solidFill>
+                  <a:schemeClr val="bg1"/>
+                </a:solidFill>
+                <a:latin typeface="Cooper Black" panose="0208090404030B020404" pitchFamily="18" charset="0"/>
+              </a:rPr>
+              <a:t>30</a:t>
+            </a:r>
+            <a:endParaRPr lang="pt-BR" dirty="0">
+              <a:solidFill>
+                <a:schemeClr val="bg1"/>
+              </a:solidFill>
+              <a:latin typeface="Cooper Black" panose="0208090404030B020404" pitchFamily="18" charset="0"/>
+            </a:endParaRPr>
+          </a:p>
+        </p:txBody>
+      </p:sp>
+      <p:pic>
+        <p:nvPicPr>
+          <p:cNvPr id="37" name="Imagem 36">
+            <a:extLst>
+              <a:ext uri="{FF2B5EF4-FFF2-40B4-BE49-F238E27FC236}">
+                <a16:creationId xmlns:a16="http://schemas.microsoft.com/office/drawing/2014/main" id="{0997390A-C039-88A4-3528-28EAD9AEE173}"/>
+              </a:ext>
+            </a:extLst>
+          </p:cNvPr>
+          <p:cNvPicPr>
+            <a:picLocks noChangeAspect="1"/>
+          </p:cNvPicPr>
+          <p:nvPr/>
+        </p:nvPicPr>
+        <p:blipFill>
+          <a:blip r:embed="rId7">
+            <a:extLst>
+              <a:ext uri="{28A0092B-C50C-407E-A947-70E740481C1C}">
+                <a14:useLocalDpi xmlns:a14="http://schemas.microsoft.com/office/drawing/2010/main" val="0"/>
+              </a:ext>
+            </a:extLst>
+          </a:blip>
+          <a:stretch>
+            <a:fillRect/>
+          </a:stretch>
+        </p:blipFill>
+        <p:spPr>
+          <a:xfrm rot="1213706">
+            <a:off x="5658770" y="2091560"/>
+            <a:ext cx="778341" cy="583756"/>
+          </a:xfrm>
+          <a:prstGeom prst="rect">
+            <a:avLst/>
+          </a:prstGeom>
+        </p:spPr>
+      </p:pic>
+      <p:pic>
+        <p:nvPicPr>
+          <p:cNvPr id="40" name="Imagem 39">
+            <a:extLst>
+              <a:ext uri="{FF2B5EF4-FFF2-40B4-BE49-F238E27FC236}">
+                <a16:creationId xmlns:a16="http://schemas.microsoft.com/office/drawing/2014/main" id="{74663B56-D2BF-06B4-5484-D0ADF0AD386B}"/>
+              </a:ext>
+            </a:extLst>
+          </p:cNvPr>
+          <p:cNvPicPr>
+            <a:picLocks noChangeAspect="1"/>
+          </p:cNvPicPr>
+          <p:nvPr/>
+        </p:nvPicPr>
+        <p:blipFill>
+          <a:blip r:embed="rId7">
+            <a:extLst>
+              <a:ext uri="{28A0092B-C50C-407E-A947-70E740481C1C}">
+                <a14:useLocalDpi xmlns:a14="http://schemas.microsoft.com/office/drawing/2010/main" val="0"/>
+              </a:ext>
+            </a:extLst>
+          </a:blip>
+          <a:stretch>
+            <a:fillRect/>
+          </a:stretch>
+        </p:blipFill>
+        <p:spPr>
+          <a:xfrm rot="1213706">
+            <a:off x="7857032" y="2069589"/>
+            <a:ext cx="778341" cy="583756"/>
+          </a:xfrm>
+          <a:prstGeom prst="rect">
+            <a:avLst/>
+          </a:prstGeom>
+        </p:spPr>
+      </p:pic>
+      <p:sp>
+        <p:nvSpPr>
+          <p:cNvPr id="44" name="CaixaDeTexto 43">
+            <a:extLst>
+              <a:ext uri="{FF2B5EF4-FFF2-40B4-BE49-F238E27FC236}">
+                <a16:creationId xmlns:a16="http://schemas.microsoft.com/office/drawing/2014/main" id="{1B472019-EA12-58AF-B0BC-FFFBF6FE7732}"/>
+              </a:ext>
+            </a:extLst>
+          </p:cNvPr>
+          <p:cNvSpPr txBox="1"/>
+          <p:nvPr/>
+        </p:nvSpPr>
+        <p:spPr>
+          <a:xfrm>
+            <a:off x="4966345" y="2824021"/>
+            <a:ext cx="1650527" cy="369332"/>
+          </a:xfrm>
+          <a:prstGeom prst="rect">
+            <a:avLst/>
+          </a:prstGeom>
+          <a:noFill/>
+        </p:spPr>
+        <p:txBody>
+          <a:bodyPr wrap="square" rtlCol="0">
             <a:spAutoFit/>
           </a:bodyPr>
           <a:lstStyle/>
@@ -4463,9 +4854,38 @@
                 </a:solidFill>
                 <a:latin typeface="Cooper Black" panose="0208090404030B020404" pitchFamily="18" charset="0"/>
               </a:rPr>
-              <a:t>WHOPPER</a:t>
-            </a:r>
-          </a:p>
+              <a:t>RODEIO</a:t>
+            </a:r>
+          </a:p>
+        </p:txBody>
+      </p:sp>
+      <p:sp>
+        <p:nvSpPr>
+          <p:cNvPr id="47" name="CaixaDeTexto 46">
+            <a:extLst>
+              <a:ext uri="{FF2B5EF4-FFF2-40B4-BE49-F238E27FC236}">
+                <a16:creationId xmlns:a16="http://schemas.microsoft.com/office/drawing/2014/main" id="{5BC7B550-7279-BF42-CD6A-93C396323590}"/>
+              </a:ext>
+            </a:extLst>
+          </p:cNvPr>
+          <p:cNvSpPr txBox="1"/>
+          <p:nvPr/>
+        </p:nvSpPr>
+        <p:spPr>
+          <a:xfrm>
+            <a:off x="7090079" y="2830815"/>
+            <a:ext cx="1650527" cy="369332"/>
+          </a:xfrm>
+          <a:prstGeom prst="rect">
+            <a:avLst/>
+          </a:prstGeom>
+          <a:noFill/>
+        </p:spPr>
+        <p:txBody>
+          <a:bodyPr wrap="square" rtlCol="0">
+            <a:spAutoFit/>
+          </a:bodyPr>
+          <a:lstStyle/>
           <a:p>
             <a:r>
               <a:rPr lang="pt-BR" dirty="0">
@@ -4474,20 +4894,253 @@
                 </a:solidFill>
                 <a:latin typeface="Cooper Black" panose="0208090404030B020404" pitchFamily="18" charset="0"/>
               </a:rPr>
-              <a:t>BARBECUE</a:t>
-            </a:r>
-          </a:p>
-          <a:p>
-            <a:r>
-              <a:rPr lang="pt-BR" dirty="0">
+              <a:t>FURIOSO</a:t>
+            </a:r>
+          </a:p>
+        </p:txBody>
+      </p:sp>
+      <p:sp>
+        <p:nvSpPr>
+          <p:cNvPr id="49" name="Elipse 48">
+            <a:extLst>
+              <a:ext uri="{FF2B5EF4-FFF2-40B4-BE49-F238E27FC236}">
+                <a16:creationId xmlns:a16="http://schemas.microsoft.com/office/drawing/2014/main" id="{A73176B5-5969-83D3-1398-27BFBD701B64}"/>
+              </a:ext>
+            </a:extLst>
+          </p:cNvPr>
+          <p:cNvSpPr/>
+          <p:nvPr/>
+        </p:nvSpPr>
+        <p:spPr>
+          <a:xfrm>
+            <a:off x="6233377" y="651800"/>
+            <a:ext cx="968539" cy="905418"/>
+          </a:xfrm>
+          <a:prstGeom prst="ellipse">
+            <a:avLst/>
+          </a:prstGeom>
+          <a:solidFill>
+            <a:srgbClr val="FF0000"/>
+          </a:solidFill>
+          <a:ln>
+            <a:solidFill>
+              <a:srgbClr val="FF0000"/>
+            </a:solidFill>
+          </a:ln>
+        </p:spPr>
+        <p:style>
+          <a:lnRef idx="2">
+            <a:schemeClr val="accent1">
+              <a:shade val="15000"/>
+            </a:schemeClr>
+          </a:lnRef>
+          <a:fillRef idx="1">
+            <a:schemeClr val="accent1"/>
+          </a:fillRef>
+          <a:effectRef idx="0">
+            <a:schemeClr val="accent1"/>
+          </a:effectRef>
+          <a:fontRef idx="minor">
+            <a:schemeClr val="lt1"/>
+          </a:fontRef>
+        </p:style>
+        <p:txBody>
+          <a:bodyPr rtlCol="0" anchor="ctr"/>
+          <a:lstStyle/>
+          <a:p>
+            <a:pPr algn="ctr"/>
+            <a:endParaRPr lang="pt-BR"/>
+          </a:p>
+        </p:txBody>
+      </p:sp>
+      <p:sp>
+        <p:nvSpPr>
+          <p:cNvPr id="52" name="Elipse 51">
+            <a:extLst>
+              <a:ext uri="{FF2B5EF4-FFF2-40B4-BE49-F238E27FC236}">
+                <a16:creationId xmlns:a16="http://schemas.microsoft.com/office/drawing/2014/main" id="{303280DD-E767-0377-E76D-CC4B9C09A5EE}"/>
+              </a:ext>
+            </a:extLst>
+          </p:cNvPr>
+          <p:cNvSpPr/>
+          <p:nvPr/>
+        </p:nvSpPr>
+        <p:spPr>
+          <a:xfrm>
+            <a:off x="6340015" y="801611"/>
+            <a:ext cx="750064" cy="779629"/>
+          </a:xfrm>
+          <a:prstGeom prst="ellipse">
+            <a:avLst/>
+          </a:prstGeom>
+          <a:blipFill dpi="0" rotWithShape="1">
+            <a:blip r:embed="rId8">
+              <a:extLst>
+                <a:ext uri="{28A0092B-C50C-407E-A947-70E740481C1C}">
+                  <a14:useLocalDpi xmlns:a14="http://schemas.microsoft.com/office/drawing/2010/main" val="0"/>
+                </a:ext>
+              </a:extLst>
+            </a:blip>
+            <a:srcRect/>
+            <a:stretch>
+              <a:fillRect/>
+            </a:stretch>
+          </a:blipFill>
+          <a:ln>
+            <a:noFill/>
+          </a:ln>
+        </p:spPr>
+        <p:style>
+          <a:lnRef idx="2">
+            <a:schemeClr val="accent1">
+              <a:shade val="15000"/>
+            </a:schemeClr>
+          </a:lnRef>
+          <a:fillRef idx="1">
+            <a:schemeClr val="accent1"/>
+          </a:fillRef>
+          <a:effectRef idx="0">
+            <a:schemeClr val="accent1"/>
+          </a:effectRef>
+          <a:fontRef idx="minor">
+            <a:schemeClr val="lt1"/>
+          </a:fontRef>
+        </p:style>
+        <p:txBody>
+          <a:bodyPr rtlCol="0" anchor="ctr"/>
+          <a:lstStyle/>
+          <a:p>
+            <a:pPr algn="ctr"/>
+            <a:endParaRPr lang="pt-BR" dirty="0"/>
+          </a:p>
+        </p:txBody>
+      </p:sp>
+      <p:sp>
+        <p:nvSpPr>
+          <p:cNvPr id="56" name="CaixaDeTexto 55">
+            <a:extLst>
+              <a:ext uri="{FF2B5EF4-FFF2-40B4-BE49-F238E27FC236}">
+                <a16:creationId xmlns:a16="http://schemas.microsoft.com/office/drawing/2014/main" id="{C10B2468-A615-6140-E8D8-2C0472759ABB}"/>
+              </a:ext>
+            </a:extLst>
+          </p:cNvPr>
+          <p:cNvSpPr txBox="1"/>
+          <p:nvPr/>
+        </p:nvSpPr>
+        <p:spPr>
+          <a:xfrm>
+            <a:off x="6266470" y="659913"/>
+            <a:ext cx="518988" cy="307777"/>
+          </a:xfrm>
+          <a:prstGeom prst="rect">
+            <a:avLst/>
+          </a:prstGeom>
+          <a:noFill/>
+        </p:spPr>
+        <p:txBody>
+          <a:bodyPr wrap="square" rtlCol="0">
+            <a:spAutoFit/>
+          </a:bodyPr>
+          <a:lstStyle/>
+          <a:p>
+            <a:r>
+              <a:rPr lang="pt-BR" sz="1400" dirty="0">
+                <a:solidFill>
+                  <a:srgbClr val="FFC000"/>
+                </a:solidFill>
+                <a:latin typeface="Cooper black" panose="0208090404030B020404" pitchFamily="18" charset="0"/>
+              </a:rPr>
+              <a:t>+</a:t>
+            </a:r>
+            <a:r>
+              <a:rPr lang="pt-BR" sz="1400" dirty="0">
+                <a:solidFill>
+                  <a:srgbClr val="F9EFDE"/>
+                </a:solidFill>
+                <a:latin typeface="Cooper black" panose="0208090404030B020404" pitchFamily="18" charset="0"/>
+              </a:rPr>
+              <a:t>14</a:t>
+            </a:r>
+          </a:p>
+        </p:txBody>
+      </p:sp>
+      <p:sp>
+        <p:nvSpPr>
+          <p:cNvPr id="59" name="CaixaDeTexto 58">
+            <a:extLst>
+              <a:ext uri="{FF2B5EF4-FFF2-40B4-BE49-F238E27FC236}">
+                <a16:creationId xmlns:a16="http://schemas.microsoft.com/office/drawing/2014/main" id="{02974EF4-FA67-0285-B9D9-75134C2C1206}"/>
+              </a:ext>
+            </a:extLst>
+          </p:cNvPr>
+          <p:cNvSpPr txBox="1"/>
+          <p:nvPr/>
+        </p:nvSpPr>
+        <p:spPr>
+          <a:xfrm>
+            <a:off x="6599880" y="666836"/>
+            <a:ext cx="371157" cy="230832"/>
+          </a:xfrm>
+          <a:prstGeom prst="rect">
+            <a:avLst/>
+          </a:prstGeom>
+          <a:noFill/>
+        </p:spPr>
+        <p:txBody>
+          <a:bodyPr wrap="square" rtlCol="0">
+            <a:spAutoFit/>
+          </a:bodyPr>
+          <a:lstStyle/>
+          <a:p>
+            <a:r>
+              <a:rPr lang="pt-BR" sz="900" dirty="0">
                 <a:solidFill>
                   <a:schemeClr val="bg1"/>
                 </a:solidFill>
-                <a:latin typeface="Cooper Black" panose="0208090404030B020404" pitchFamily="18" charset="0"/>
+                <a:latin typeface="Cooper black" panose="0208090404030B020404" pitchFamily="18" charset="0"/>
               </a:rPr>
-              <a:t> BACON</a:t>
-            </a:r>
-            <a:endParaRPr lang="pt-BR" sz="1600" dirty="0"/>
+              <a:t>,90</a:t>
+            </a:r>
+          </a:p>
+        </p:txBody>
+      </p:sp>
+      <p:sp>
+        <p:nvSpPr>
+          <p:cNvPr id="61" name="CaixaDeTexto 60">
+            <a:extLst>
+              <a:ext uri="{FF2B5EF4-FFF2-40B4-BE49-F238E27FC236}">
+                <a16:creationId xmlns:a16="http://schemas.microsoft.com/office/drawing/2014/main" id="{F5F6E82C-EF68-22A4-78D6-68EFCA5B98B5}"/>
+              </a:ext>
+            </a:extLst>
+          </p:cNvPr>
+          <p:cNvSpPr txBox="1"/>
+          <p:nvPr/>
+        </p:nvSpPr>
+        <p:spPr>
+          <a:xfrm>
+            <a:off x="6247572" y="879664"/>
+            <a:ext cx="883600" cy="276999"/>
+          </a:xfrm>
+          <a:prstGeom prst="rect">
+            <a:avLst/>
+          </a:prstGeom>
+          <a:noFill/>
+        </p:spPr>
+        <p:txBody>
+          <a:bodyPr wrap="square" rtlCol="0">
+            <a:spAutoFit/>
+          </a:bodyPr>
+          <a:lstStyle/>
+          <a:p>
+            <a:r>
+              <a:rPr lang="pt-BR" sz="1200" dirty="0">
+                <a:solidFill>
+                  <a:schemeClr val="bg1"/>
+                </a:solidFill>
+                <a:latin typeface="Cooper black" panose="0208090404030B020404" pitchFamily="18" charset="0"/>
+              </a:rPr>
+              <a:t>Reais</a:t>
+            </a:r>
           </a:p>
         </p:txBody>
       </p:sp>
